--- a/dist/초5/수학/분수의덧셈과뺄셈/초5_수학_분수의덧셈과뺄셈_01_분모가다른분수의덧셈.pptx
+++ b/dist/초5/수학/분수의덧셈과뺄셈/초5_수학_분수의덧셈과뺄셈_01_분모가다른분수의덧셈.pptx
@@ -121,13 +121,13 @@
   <p:extLst>
     <p:ext uri="{521415D9-36F7-43E2-AB2F-B90AF26B5E84}">
       <p14:sectionLst xmlns:p14="http://schemas.microsoft.com/office/powerpoint/2010/main">
-        <p14:section name="도입" id="{13a2566f-0575-0e52-1827-877f6319a239}">
+        <p14:section name="도입" id="{11c1e308-4390-ac22-30b7-75689bc56987}">
           <p14:sldIdLst>
             <p14:sldId id="256"/>
             <p14:sldId id="257"/>
           </p14:sldIdLst>
         </p14:section>
-        <p14:section name="개념" id="{8f0f1096-31a1-ea47-f2bf-51013eb63cd6}">
+        <p14:section name="개념" id="{de316828-a537-90fc-807f-80ad30616e12}">
           <p14:sldIdLst>
             <p14:sldId id="258"/>
             <p14:sldId id="259"/>
@@ -136,38 +136,38 @@
             <p14:sldId id="264"/>
           </p14:sldIdLst>
         </p14:section>
-        <p14:section name="연습" id="{c32c610d-011f-1ddc-3075-6b9da83b74a8}">
+        <p14:section name="연습" id="{18395a0d-62d4-89e3-3185-9aefb374d11b}">
           <p14:sldIdLst>
             <p14:sldId id="260"/>
             <p14:sldId id="262"/>
             <p14:sldId id="265"/>
           </p14:sldIdLst>
         </p14:section>
-        <p14:section name="개념" id="{517fb044-81f1-6a75-02fd-ca2b902e4edd}">
+        <p14:section name="개념" id="{474082e3-3881-1d41-49fc-ef51958db989}">
           <p14:sldIdLst/>
         </p14:section>
-        <p14:section name="연습" id="{958a2027-aece-f44c-049d-2190d8109526}">
+        <p14:section name="연습" id="{2590d185-6989-60b7-9eb7-4f479081c8fe}">
           <p14:sldIdLst/>
         </p14:section>
-        <p14:section name="개념" id="{5692b414-4139-5ee2-1533-cecf36142bf4}">
+        <p14:section name="개념" id="{c40ae3c4-805f-6b6f-e948-d5825da73910}">
           <p14:sldIdLst/>
         </p14:section>
-        <p14:section name="연습" id="{e149253d-d10a-36c2-99f7-5b6ca1306aae}">
+        <p14:section name="연습" id="{fcb262cf-17e2-cc22-5c1f-8d105307aa0e}">
           <p14:sldIdLst/>
         </p14:section>
-        <p14:section name="확인" id="{648c0efb-6e20-e190-ff1f-f3c3ff7eb510}">
+        <p14:section name="확인" id="{0c164619-e2ba-108c-09c4-d40bf3855840}">
           <p14:sldIdLst>
             <p14:sldId id="266"/>
             <p14:sldId id="267"/>
             <p14:sldId id="268"/>
           </p14:sldIdLst>
         </p14:section>
-        <p14:section name="정리" id="{098b12a1-3819-87e0-15c5-3bcc412d642d}">
+        <p14:section name="정리" id="{90259cf5-0570-e743-8583-d84b697a8a3b}">
           <p14:sldIdLst>
             <p14:sldId id="269"/>
           </p14:sldIdLst>
         </p14:section>
-        <p14:section name="보충" id="{1f52d18e-91cd-7e6a-37a1-3261cb12da9d}">
+        <p14:section name="보충" id="{a570b068-f713-d0ff-ada3-08c3b688aaee}">
           <p14:sldIdLst>
             <p14:sldId id="270"/>
           </p14:sldIdLst>
@@ -888,7 +888,7 @@
 막히면
 - 분모끼리 더했으면 S07로(M1), 약분하지 않았으면 S04로, 받아올리지 않았으면 S09로(M4) 돌아갑니다.
 주의
-- 30분의 14, 8분의 11, 3과 18분의 23는 크기로는 맞는 답입니다. ‘계산은 맞았고 나타내기만 남았다’고 말해 주고 기약분수·대분수로 고쳐 쓰게 합니다.
+- 30분의 14, 8분의 11, 3과 18분의 23은 크기로는 맞는 답입니다. ‘계산은 맞았고 나타내기만 남았다’고 말해 주고 기약분수·대분수로 고쳐 쓰게 합니다.
 - 이 장은 학생용 파일에는 없습니다. 아이와 함께 볼 때는 슬라이드 쇼로 보여 줍니다.</a:t>
             </a:r>
             <a:endParaRPr lang="en-US" dirty="0"/>
